--- a/dist/초3/수학/자연수계산/초3_수학_자연수계산_07_두자리수×두자리수.pptx
+++ b/dist/초3/수학/자연수계산/초3_수학_자연수계산_07_두자리수×두자리수.pptx
@@ -120,13 +120,13 @@
   <p:extLst>
     <p:ext uri="{521415D9-36F7-43E2-AB2F-B90AF26B5E84}">
       <p14:sectionLst xmlns:p14="http://schemas.microsoft.com/office/powerpoint/2010/main">
-        <p14:section name="도입" id="{aa0e9d0e-e5bc-9666-86b3-7439c607baf1}">
+        <p14:section name="도입" id="{29999ec0-ef15-35cc-bdab-d07b364dfa5e}">
           <p14:sldIdLst>
             <p14:sldId id="256"/>
             <p14:sldId id="257"/>
           </p14:sldIdLst>
         </p14:section>
-        <p14:section name="개념" id="{7e31fcb7-fafc-89c1-442c-20246084e225}">
+        <p14:section name="개념" id="{9b2e8cf5-33f0-5556-2d8c-d72d10b2db02}">
           <p14:sldIdLst>
             <p14:sldId id="258"/>
             <p14:sldId id="259"/>
@@ -134,32 +134,32 @@
             <p14:sldId id="262"/>
           </p14:sldIdLst>
         </p14:section>
-        <p14:section name="연습" id="{a894f98c-47cd-b1a7-f551-94bafb70fff0}">
+        <p14:section name="연습" id="{9af6382f-299d-a92e-e9e1-b3cdb33aa21e}">
           <p14:sldIdLst>
             <p14:sldId id="260"/>
             <p14:sldId id="263"/>
             <p14:sldId id="264"/>
           </p14:sldIdLst>
         </p14:section>
-        <p14:section name="개념" id="{a16fc31a-416d-3a03-1deb-375c8f937cae}">
+        <p14:section name="개념" id="{3f2ee174-bdaa-3aa9-b5b0-11d415174c47}">
           <p14:sldIdLst/>
         </p14:section>
-        <p14:section name="연습" id="{10b9d7a4-fb97-59b2-2750-4d15049225ca}">
+        <p14:section name="연습" id="{b9d705f7-0985-442b-3a00-50ac044a12b5}">
           <p14:sldIdLst/>
         </p14:section>
-        <p14:section name="확인" id="{2c46a9a2-f648-ee0d-beb0-436059e6eaac}">
+        <p14:section name="확인" id="{3069f274-78cd-f144-1761-d31a00205ebe}">
           <p14:sldIdLst>
             <p14:sldId id="265"/>
             <p14:sldId id="266"/>
             <p14:sldId id="267"/>
           </p14:sldIdLst>
         </p14:section>
-        <p14:section name="정리" id="{79a96355-1300-9fde-4d7d-5c26b28c2269}">
+        <p14:section name="정리" id="{d419576b-b668-b2d4-e5be-8a847f15d4d5}">
           <p14:sldIdLst>
             <p14:sldId id="268"/>
           </p14:sldIdLst>
         </p14:section>
-        <p14:section name="보충" id="{c5287974-7631-3797-3c0d-aab43c7db284}">
+        <p14:section name="보충" id="{308fe2d6-4196-413a-b5cf-1788dfa65940}">
           <p14:sldIdLst>
             <p14:sldId id="269"/>
           </p14:sldIdLst>
@@ -5317,7 +5317,7 @@
                 <a:ea typeface="맑은 고딕" pitchFamily="34" charset="-122"/>
                 <a:cs typeface="맑은 고딕" pitchFamily="34" charset="-120"/>
               </a:rPr>
-              <a:t>둘째 줄을 23으로 씀</a:t>
+              <a:t>23을 그냥 더함</a:t>
             </a:r>
             <a:endParaRPr lang="ko-KR" sz="2400" dirty="0"/>
           </a:p>

--- a/dist/초3/수학/자연수계산/초3_수학_자연수계산_07_두자리수×두자리수.pptx
+++ b/dist/초3/수학/자연수계산/초3_수학_자연수계산_07_두자리수×두자리수.pptx
@@ -120,13 +120,13 @@
   <p:extLst>
     <p:ext uri="{521415D9-36F7-43E2-AB2F-B90AF26B5E84}">
       <p14:sectionLst xmlns:p14="http://schemas.microsoft.com/office/powerpoint/2010/main">
-        <p14:section name="도입" id="{29999ec0-ef15-35cc-bdab-d07b364dfa5e}">
+        <p14:section name="도입" id="{9ffa1f63-f47c-71f0-1d7a-991e40db4f56}">
           <p14:sldIdLst>
             <p14:sldId id="256"/>
             <p14:sldId id="257"/>
           </p14:sldIdLst>
         </p14:section>
-        <p14:section name="개념" id="{9b2e8cf5-33f0-5556-2d8c-d72d10b2db02}">
+        <p14:section name="개념" id="{0eff1f69-efc5-80dc-13ce-8f23a47b6e11}">
           <p14:sldIdLst>
             <p14:sldId id="258"/>
             <p14:sldId id="259"/>
@@ -134,32 +134,32 @@
             <p14:sldId id="262"/>
           </p14:sldIdLst>
         </p14:section>
-        <p14:section name="연습" id="{9af6382f-299d-a92e-e9e1-b3cdb33aa21e}">
+        <p14:section name="연습" id="{8d5739a3-1ab1-16d3-480f-c7393d9e9b1f}">
           <p14:sldIdLst>
             <p14:sldId id="260"/>
             <p14:sldId id="263"/>
             <p14:sldId id="264"/>
           </p14:sldIdLst>
         </p14:section>
-        <p14:section name="개념" id="{3f2ee174-bdaa-3aa9-b5b0-11d415174c47}">
+        <p14:section name="개념" id="{106f0630-6d0f-d1b1-0006-446d832a362f}">
           <p14:sldIdLst/>
         </p14:section>
-        <p14:section name="연습" id="{b9d705f7-0985-442b-3a00-50ac044a12b5}">
+        <p14:section name="연습" id="{f60e2f7c-8177-a093-0212-e27c1eb730c4}">
           <p14:sldIdLst/>
         </p14:section>
-        <p14:section name="확인" id="{3069f274-78cd-f144-1761-d31a00205ebe}">
+        <p14:section name="확인" id="{73ce826f-7ed8-294b-f4b6-94923ec82de9}">
           <p14:sldIdLst>
             <p14:sldId id="265"/>
             <p14:sldId id="266"/>
             <p14:sldId id="267"/>
           </p14:sldIdLst>
         </p14:section>
-        <p14:section name="정리" id="{d419576b-b668-b2d4-e5be-8a847f15d4d5}">
+        <p14:section name="정리" id="{f227f135-f66a-231c-f4a2-cbaa84ad8605}">
           <p14:sldIdLst>
             <p14:sldId id="268"/>
           </p14:sldIdLst>
         </p14:section>
-        <p14:section name="보충" id="{308fe2d6-4196-413a-b5cf-1788dfa65940}">
+        <p14:section name="보충" id="{73a9940a-3ff1-232c-9189-47f0ee6e4339}">
           <p14:sldIdLst>
             <p14:sldId id="269"/>
           </p14:sldIdLst>
@@ -3040,7 +3040,7 @@
           </p:nvPr>
         </p:nvGraphicFramePr>
         <p:xfrm>
-          <a:off x="8001000" y="883920"/>
+          <a:off x="8001000" y="922020"/>
           <a:ext cx="3291840" cy="914400"/>
         </p:xfrm>
         <a:graphic>
@@ -3053,7 +3053,7 @@
                 <a:gridCol w="822960"/>
                 <a:gridCol w="822960"/>
               </a:tblGrid>
-              <a:tr h="609600">
+              <a:tr h="590550">
                 <a:tc>
                   <a:txBody>
                     <a:bodyPr/>
@@ -3316,7 +3316,7 @@
                   </a:tcPr>
                 </a:tc>
               </a:tr>
-              <a:tr h="609600">
+              <a:tr h="590550">
                 <a:tc>
                   <a:txBody>
                     <a:bodyPr/>
@@ -3568,7 +3568,7 @@
                   </a:tcPr>
                 </a:tc>
               </a:tr>
-              <a:tr h="609600">
+              <a:tr h="590550">
                 <a:tc>
                   <a:txBody>
                     <a:bodyPr/>
@@ -3831,7 +3831,7 @@
                   </a:tcPr>
                 </a:tc>
               </a:tr>
-              <a:tr h="609600">
+              <a:tr h="590550">
                 <a:tc>
                   <a:txBody>
                     <a:bodyPr/>
@@ -10876,7 +10876,7 @@
           </p:nvPr>
         </p:nvGraphicFramePr>
         <p:xfrm>
-          <a:off x="1979676" y="2241550"/>
+          <a:off x="1979676" y="2277110"/>
           <a:ext cx="8229600" cy="914400"/>
         </p:xfrm>
         <a:graphic>
@@ -10888,7 +10888,7 @@
                 <a:gridCol w="2139696"/>
                 <a:gridCol w="3456432"/>
               </a:tblGrid>
-              <a:tr h="568960">
+              <a:tr h="551180">
                 <a:tc>
                   <a:txBody>
                     <a:bodyPr/>
@@ -11094,7 +11094,7 @@
                   </a:tcPr>
                 </a:tc>
               </a:tr>
-              <a:tr h="568960">
+              <a:tr h="551180">
                 <a:tc>
                   <a:txBody>
                     <a:bodyPr/>
@@ -11289,7 +11289,7 @@
                   </a:tcPr>
                 </a:tc>
               </a:tr>
-              <a:tr h="568960">
+              <a:tr h="551180">
                 <a:tc>
                   <a:txBody>
                     <a:bodyPr/>
@@ -11495,7 +11495,7 @@
                   </a:tcPr>
                 </a:tc>
               </a:tr>
-              <a:tr h="568960">
+              <a:tr h="551180">
                 <a:tc>
                   <a:txBody>
                     <a:bodyPr/>
@@ -11942,7 +11942,7 @@
           </p:nvPr>
         </p:nvGraphicFramePr>
         <p:xfrm>
-          <a:off x="7757770" y="2346960"/>
+          <a:off x="7757770" y="2385060"/>
           <a:ext cx="3474720" cy="914400"/>
         </p:xfrm>
         <a:graphic>
@@ -11955,7 +11955,7 @@
                 <a:gridCol w="868680"/>
                 <a:gridCol w="868680"/>
               </a:tblGrid>
-              <a:tr h="609600">
+              <a:tr h="590550">
                 <a:tc>
                   <a:txBody>
                     <a:bodyPr/>
@@ -12218,7 +12218,7 @@
                   </a:tcPr>
                 </a:tc>
               </a:tr>
-              <a:tr h="609600">
+              <a:tr h="590550">
                 <a:tc>
                   <a:txBody>
                     <a:bodyPr/>
@@ -12470,7 +12470,7 @@
                   </a:tcPr>
                 </a:tc>
               </a:tr>
-              <a:tr h="609600">
+              <a:tr h="590550">
                 <a:tc>
                   <a:txBody>
                     <a:bodyPr/>
@@ -12733,7 +12733,7 @@
                   </a:tcPr>
                 </a:tc>
               </a:tr>
-              <a:tr h="609600">
+              <a:tr h="590550">
                 <a:tc>
                   <a:txBody>
                     <a:bodyPr/>
@@ -13008,7 +13008,7 @@
         </p:nvSpPr>
         <p:spPr>
           <a:xfrm>
-            <a:off x="548640" y="2578608"/>
+            <a:off x="548640" y="2388108"/>
             <a:ext cx="548640" cy="548640"/>
           </a:xfrm>
           <a:prstGeom prst="ellipse">
@@ -13053,7 +13053,7 @@
         </p:nvSpPr>
         <p:spPr>
           <a:xfrm>
-            <a:off x="1325880" y="2578608"/>
+            <a:off x="1325880" y="2388108"/>
             <a:ext cx="5658307" cy="548640"/>
           </a:xfrm>
           <a:prstGeom prst="rect">
@@ -13092,7 +13092,7 @@
         </p:nvSpPr>
         <p:spPr>
           <a:xfrm>
-            <a:off x="548640" y="3291840"/>
+            <a:off x="548640" y="3147060"/>
             <a:ext cx="548640" cy="548640"/>
           </a:xfrm>
           <a:prstGeom prst="ellipse">
@@ -13137,8 +13137,8 @@
         </p:nvSpPr>
         <p:spPr>
           <a:xfrm>
-            <a:off x="1325880" y="3291840"/>
-            <a:ext cx="5658307" cy="548640"/>
+            <a:off x="1325880" y="3101340"/>
+            <a:ext cx="5658307" cy="929640"/>
           </a:xfrm>
           <a:prstGeom prst="rect">
             <a:avLst/>
@@ -13176,7 +13176,7 @@
         </p:nvSpPr>
         <p:spPr>
           <a:xfrm>
-            <a:off x="548640" y="4005072"/>
+            <a:off x="548640" y="4195572"/>
             <a:ext cx="548640" cy="548640"/>
           </a:xfrm>
           <a:prstGeom prst="ellipse">
@@ -13221,7 +13221,7 @@
         </p:nvSpPr>
         <p:spPr>
           <a:xfrm>
-            <a:off x="1325880" y="4005072"/>
+            <a:off x="1325880" y="4195572"/>
             <a:ext cx="5658307" cy="548640"/>
           </a:xfrm>
           <a:prstGeom prst="rect">
@@ -18702,7 +18702,7 @@
           </p:nvPr>
         </p:nvGraphicFramePr>
         <p:xfrm>
-          <a:off x="7376190" y="2103120"/>
+          <a:off x="7376190" y="2030730"/>
           <a:ext cx="4023360" cy="914400"/>
         </p:xfrm>
         <a:graphic>
@@ -18715,7 +18715,7 @@
                 <a:gridCol w="1005840"/>
                 <a:gridCol w="1005840"/>
               </a:tblGrid>
-              <a:tr h="487680">
+              <a:tr h="511810">
                 <a:tc>
                   <a:txBody>
                     <a:bodyPr/>
@@ -18724,7 +18724,7 @@
                       <a:pPr eaLnBrk="0" algn="ctr" indent="0" marL="0">
                         <a:buNone/>
                       </a:pPr>
-                      <a:endParaRPr lang="en-US" sz="2400" dirty="0">
+                      <a:endParaRPr lang="en-US" sz="2600" dirty="0">
                         <a:latin typeface="맑은 고딕" charset="0"/>
                         <a:ea typeface="맑은 고딕" charset="0"/>
                         <a:cs typeface="맑은 고딕" charset="0"/>
@@ -18782,7 +18782,7 @@
                         <a:buNone/>
                       </a:pPr>
                       <a:r>
-                        <a:rPr lang="en-US" sz="2400" b="1" dirty="0">
+                        <a:rPr lang="en-US" sz="2600" b="1" dirty="0">
                           <a:solidFill>
                             <a:srgbClr val="1F2937"/>
                           </a:solidFill>
@@ -18792,7 +18792,7 @@
                         </a:rPr>
                         <a:t>백</a:t>
                       </a:r>
-                      <a:endParaRPr lang="en-US" sz="2400" dirty="0">
+                      <a:endParaRPr lang="en-US" sz="2600" dirty="0">
                         <a:latin typeface="맑은 고딕" charset="0"/>
                         <a:ea typeface="맑은 고딕" charset="0"/>
                         <a:cs typeface="맑은 고딕" charset="0"/>
@@ -18850,7 +18850,7 @@
                         <a:buNone/>
                       </a:pPr>
                       <a:r>
-                        <a:rPr lang="en-US" sz="2400" b="1" dirty="0">
+                        <a:rPr lang="en-US" sz="2600" b="1" dirty="0">
                           <a:solidFill>
                             <a:srgbClr val="1F2937"/>
                           </a:solidFill>
@@ -18860,7 +18860,7 @@
                         </a:rPr>
                         <a:t>십</a:t>
                       </a:r>
-                      <a:endParaRPr lang="en-US" sz="2400" dirty="0">
+                      <a:endParaRPr lang="en-US" sz="2600" dirty="0">
                         <a:latin typeface="맑은 고딕" charset="0"/>
                         <a:ea typeface="맑은 고딕" charset="0"/>
                         <a:cs typeface="맑은 고딕" charset="0"/>
@@ -18918,7 +18918,7 @@
                         <a:buNone/>
                       </a:pPr>
                       <a:r>
-                        <a:rPr lang="en-US" sz="2400" b="1" dirty="0">
+                        <a:rPr lang="en-US" sz="2600" b="1" dirty="0">
                           <a:solidFill>
                             <a:srgbClr val="1F2937"/>
                           </a:solidFill>
@@ -18928,7 +18928,7 @@
                         </a:rPr>
                         <a:t>일</a:t>
                       </a:r>
-                      <a:endParaRPr lang="en-US" sz="2400" dirty="0">
+                      <a:endParaRPr lang="en-US" sz="2600" dirty="0">
                         <a:latin typeface="맑은 고딕" charset="0"/>
                         <a:ea typeface="맑은 고딕" charset="0"/>
                         <a:cs typeface="맑은 고딕" charset="0"/>
@@ -18978,7 +18978,7 @@
                   </a:tcPr>
                 </a:tc>
               </a:tr>
-              <a:tr h="487680">
+              <a:tr h="511810">
                 <a:tc>
                   <a:txBody>
                     <a:bodyPr/>
@@ -18987,7 +18987,7 @@
                       <a:pPr eaLnBrk="0" algn="ctr" indent="0" marL="0">
                         <a:buNone/>
                       </a:pPr>
-                      <a:endParaRPr lang="en-US" sz="2400" dirty="0">
+                      <a:endParaRPr lang="en-US" sz="2600" dirty="0">
                         <a:latin typeface="맑은 고딕" charset="0"/>
                         <a:ea typeface="맑은 고딕" charset="0"/>
                         <a:cs typeface="맑은 고딕" charset="0"/>
@@ -19044,7 +19044,7 @@
                       <a:pPr eaLnBrk="0" algn="ctr" indent="0" marL="0">
                         <a:buNone/>
                       </a:pPr>
-                      <a:endParaRPr lang="en-US" sz="2400" dirty="0">
+                      <a:endParaRPr lang="en-US" sz="2600" dirty="0">
                         <a:latin typeface="맑은 고딕" charset="0"/>
                         <a:ea typeface="맑은 고딕" charset="0"/>
                         <a:cs typeface="맑은 고딕" charset="0"/>
@@ -19102,7 +19102,7 @@
                         <a:buNone/>
                       </a:pPr>
                       <a:r>
-                        <a:rPr lang="en-US" sz="2400" dirty="0">
+                        <a:rPr lang="en-US" sz="2600" dirty="0">
                           <a:solidFill>
                             <a:srgbClr val="1F2937"/>
                           </a:solidFill>
@@ -19112,7 +19112,7 @@
                         </a:rPr>
                         <a:t>2</a:t>
                       </a:r>
-                      <a:endParaRPr lang="en-US" sz="2400" dirty="0">
+                      <a:endParaRPr lang="en-US" sz="2600" dirty="0">
                         <a:latin typeface="맑은 고딕" charset="0"/>
                         <a:ea typeface="맑은 고딕" charset="0"/>
                         <a:cs typeface="맑은 고딕" charset="0"/>
@@ -19170,7 +19170,7 @@
                         <a:buNone/>
                       </a:pPr>
                       <a:r>
-                        <a:rPr lang="en-US" sz="2400" dirty="0">
+                        <a:rPr lang="en-US" sz="2600" dirty="0">
                           <a:solidFill>
                             <a:srgbClr val="1F2937"/>
                           </a:solidFill>
@@ -19180,7 +19180,7 @@
                         </a:rPr>
                         <a:t>4</a:t>
                       </a:r>
-                      <a:endParaRPr lang="en-US" sz="2400" dirty="0">
+                      <a:endParaRPr lang="en-US" sz="2600" dirty="0">
                         <a:latin typeface="맑은 고딕" charset="0"/>
                         <a:ea typeface="맑은 고딕" charset="0"/>
                         <a:cs typeface="맑은 고딕" charset="0"/>
@@ -19230,7 +19230,7 @@
                   </a:tcPr>
                 </a:tc>
               </a:tr>
-              <a:tr h="487680">
+              <a:tr h="511810">
                 <a:tc>
                   <a:txBody>
                     <a:bodyPr/>
@@ -19240,7 +19240,7 @@
                         <a:buNone/>
                       </a:pPr>
                       <a:r>
-                        <a:rPr lang="en-US" sz="2400" dirty="0">
+                        <a:rPr lang="en-US" sz="2600" dirty="0">
                           <a:solidFill>
                             <a:srgbClr val="1F2937"/>
                           </a:solidFill>
@@ -19250,7 +19250,7 @@
                         </a:rPr>
                         <a:t>×</a:t>
                       </a:r>
-                      <a:endParaRPr lang="en-US" sz="2400" dirty="0">
+                      <a:endParaRPr lang="en-US" sz="2600" dirty="0">
                         <a:latin typeface="맑은 고딕" charset="0"/>
                         <a:ea typeface="맑은 고딕" charset="0"/>
                         <a:cs typeface="맑은 고딕" charset="0"/>
@@ -19307,7 +19307,7 @@
                       <a:pPr eaLnBrk="0" algn="ctr" indent="0" marL="0">
                         <a:buNone/>
                       </a:pPr>
-                      <a:endParaRPr lang="en-US" sz="2400" dirty="0">
+                      <a:endParaRPr lang="en-US" sz="2600" dirty="0">
                         <a:latin typeface="맑은 고딕" charset="0"/>
                         <a:ea typeface="맑은 고딕" charset="0"/>
                         <a:cs typeface="맑은 고딕" charset="0"/>
@@ -19365,7 +19365,7 @@
                         <a:buNone/>
                       </a:pPr>
                       <a:r>
-                        <a:rPr lang="en-US" sz="2400" dirty="0">
+                        <a:rPr lang="en-US" sz="2600" dirty="0">
                           <a:solidFill>
                             <a:srgbClr val="1F2937"/>
                           </a:solidFill>
@@ -19375,7 +19375,7 @@
                         </a:rPr>
                         <a:t>1</a:t>
                       </a:r>
-                      <a:endParaRPr lang="en-US" sz="2400" dirty="0">
+                      <a:endParaRPr lang="en-US" sz="2600" dirty="0">
                         <a:latin typeface="맑은 고딕" charset="0"/>
                         <a:ea typeface="맑은 고딕" charset="0"/>
                         <a:cs typeface="맑은 고딕" charset="0"/>
@@ -19433,7 +19433,7 @@
                         <a:buNone/>
                       </a:pPr>
                       <a:r>
-                        <a:rPr lang="en-US" sz="2400" dirty="0">
+                        <a:rPr lang="en-US" sz="2600" dirty="0">
                           <a:solidFill>
                             <a:srgbClr val="1F2937"/>
                           </a:solidFill>
@@ -19443,7 +19443,7 @@
                         </a:rPr>
                         <a:t>3</a:t>
                       </a:r>
-                      <a:endParaRPr lang="en-US" sz="2400" dirty="0">
+                      <a:endParaRPr lang="en-US" sz="2600" dirty="0">
                         <a:latin typeface="맑은 고딕" charset="0"/>
                         <a:ea typeface="맑은 고딕" charset="0"/>
                         <a:cs typeface="맑은 고딕" charset="0"/>
@@ -19493,7 +19493,7 @@
                   </a:tcPr>
                 </a:tc>
               </a:tr>
-              <a:tr h="487680">
+              <a:tr h="511810">
                 <a:tc>
                   <a:txBody>
                     <a:bodyPr/>
@@ -19502,7 +19502,7 @@
                       <a:pPr eaLnBrk="0" algn="ctr" indent="0" marL="0">
                         <a:buNone/>
                       </a:pPr>
-                      <a:endParaRPr lang="en-US" sz="2400" dirty="0">
+                      <a:endParaRPr lang="en-US" sz="2600" dirty="0">
                         <a:latin typeface="맑은 고딕" charset="0"/>
                         <a:ea typeface="맑은 고딕" charset="0"/>
                         <a:cs typeface="맑은 고딕" charset="0"/>
@@ -19559,7 +19559,7 @@
                       <a:pPr eaLnBrk="0" algn="ctr" indent="0" marL="0">
                         <a:buNone/>
                       </a:pPr>
-                      <a:endParaRPr lang="en-US" sz="2400" dirty="0">
+                      <a:endParaRPr lang="en-US" sz="2600" dirty="0">
                         <a:latin typeface="맑은 고딕" charset="0"/>
                         <a:ea typeface="맑은 고딕" charset="0"/>
                         <a:cs typeface="맑은 고딕" charset="0"/>
@@ -19617,7 +19617,7 @@
                         <a:buNone/>
                       </a:pPr>
                       <a:r>
-                        <a:rPr lang="en-US" sz="2400" dirty="0">
+                        <a:rPr lang="en-US" sz="2600" dirty="0">
                           <a:solidFill>
                             <a:srgbClr val="1F2937"/>
                           </a:solidFill>
@@ -19627,7 +19627,7 @@
                         </a:rPr>
                         <a:t>7</a:t>
                       </a:r>
-                      <a:endParaRPr lang="en-US" sz="2400" dirty="0">
+                      <a:endParaRPr lang="en-US" sz="2600" dirty="0">
                         <a:latin typeface="맑은 고딕" charset="0"/>
                         <a:ea typeface="맑은 고딕" charset="0"/>
                         <a:cs typeface="맑은 고딕" charset="0"/>
@@ -19685,7 +19685,7 @@
                         <a:buNone/>
                       </a:pPr>
                       <a:r>
-                        <a:rPr lang="en-US" sz="2400" dirty="0">
+                        <a:rPr lang="en-US" sz="2600" dirty="0">
                           <a:solidFill>
                             <a:srgbClr val="1F2937"/>
                           </a:solidFill>
@@ -19695,7 +19695,7 @@
                         </a:rPr>
                         <a:t>2</a:t>
                       </a:r>
-                      <a:endParaRPr lang="en-US" sz="2400" dirty="0">
+                      <a:endParaRPr lang="en-US" sz="2600" dirty="0">
                         <a:latin typeface="맑은 고딕" charset="0"/>
                         <a:ea typeface="맑은 고딕" charset="0"/>
                         <a:cs typeface="맑은 고딕" charset="0"/>
@@ -19745,7 +19745,7 @@
                   </a:tcPr>
                 </a:tc>
               </a:tr>
-              <a:tr h="487680">
+              <a:tr h="511810">
                 <a:tc>
                   <a:txBody>
                     <a:bodyPr/>
@@ -19754,7 +19754,7 @@
                       <a:pPr eaLnBrk="0" algn="ctr" indent="0" marL="0">
                         <a:buNone/>
                       </a:pPr>
-                      <a:endParaRPr lang="en-US" sz="2400" dirty="0">
+                      <a:endParaRPr lang="en-US" sz="2600" dirty="0">
                         <a:latin typeface="맑은 고딕" charset="0"/>
                         <a:ea typeface="맑은 고딕" charset="0"/>
                         <a:cs typeface="맑은 고딕" charset="0"/>
@@ -19812,7 +19812,7 @@
                         <a:buNone/>
                       </a:pPr>
                       <a:r>
-                        <a:rPr lang="en-US" sz="2400" dirty="0">
+                        <a:rPr lang="en-US" sz="2600" dirty="0">
                           <a:solidFill>
                             <a:srgbClr val="1F2937"/>
                           </a:solidFill>
@@ -19822,7 +19822,7 @@
                         </a:rPr>
                         <a:t>2</a:t>
                       </a:r>
-                      <a:endParaRPr lang="en-US" sz="2400" dirty="0">
+                      <a:endParaRPr lang="en-US" sz="2600" dirty="0">
                         <a:latin typeface="맑은 고딕" charset="0"/>
                         <a:ea typeface="맑은 고딕" charset="0"/>
                         <a:cs typeface="맑은 고딕" charset="0"/>
@@ -19880,7 +19880,7 @@
                         <a:buNone/>
                       </a:pPr>
                       <a:r>
-                        <a:rPr lang="en-US" sz="2400" dirty="0">
+                        <a:rPr lang="en-US" sz="2600" dirty="0">
                           <a:solidFill>
                             <a:srgbClr val="1F2937"/>
                           </a:solidFill>
@@ -19890,7 +19890,7 @@
                         </a:rPr>
                         <a:t>4</a:t>
                       </a:r>
-                      <a:endParaRPr lang="en-US" sz="2400" dirty="0">
+                      <a:endParaRPr lang="en-US" sz="2600" dirty="0">
                         <a:latin typeface="맑은 고딕" charset="0"/>
                         <a:ea typeface="맑은 고딕" charset="0"/>
                         <a:cs typeface="맑은 고딕" charset="0"/>
@@ -19948,7 +19948,7 @@
                         <a:buNone/>
                       </a:pPr>
                       <a:r>
-                        <a:rPr lang="en-US" sz="2400" dirty="0">
+                        <a:rPr lang="en-US" sz="2600" dirty="0">
                           <a:solidFill>
                             <a:srgbClr val="1F2937"/>
                           </a:solidFill>
@@ -19958,7 +19958,7 @@
                         </a:rPr>
                         <a:t>0</a:t>
                       </a:r>
-                      <a:endParaRPr lang="en-US" sz="2400" dirty="0">
+                      <a:endParaRPr lang="en-US" sz="2600" dirty="0">
                         <a:latin typeface="맑은 고딕" charset="0"/>
                         <a:ea typeface="맑은 고딕" charset="0"/>
                         <a:cs typeface="맑은 고딕" charset="0"/>
@@ -20008,7 +20008,7 @@
                   </a:tcPr>
                 </a:tc>
               </a:tr>
-              <a:tr h="487680">
+              <a:tr h="511810">
                 <a:tc>
                   <a:txBody>
                     <a:bodyPr/>
@@ -20017,7 +20017,7 @@
                       <a:pPr eaLnBrk="0" algn="ctr" indent="0" marL="0">
                         <a:buNone/>
                       </a:pPr>
-                      <a:endParaRPr lang="en-US" sz="2400" dirty="0">
+                      <a:endParaRPr lang="en-US" sz="2600" dirty="0">
                         <a:latin typeface="맑은 고딕" charset="0"/>
                         <a:ea typeface="맑은 고딕" charset="0"/>
                         <a:cs typeface="맑은 고딕" charset="0"/>
@@ -20075,7 +20075,7 @@
                         <a:buNone/>
                       </a:pPr>
                       <a:r>
-                        <a:rPr lang="en-US" sz="2400" dirty="0">
+                        <a:rPr lang="en-US" sz="2600" dirty="0">
                           <a:solidFill>
                             <a:srgbClr val="1F2937"/>
                           </a:solidFill>
@@ -20085,7 +20085,7 @@
                         </a:rPr>
                         <a:t>3</a:t>
                       </a:r>
-                      <a:endParaRPr lang="en-US" sz="2400" dirty="0">
+                      <a:endParaRPr lang="en-US" sz="2600" dirty="0">
                         <a:latin typeface="맑은 고딕" charset="0"/>
                         <a:ea typeface="맑은 고딕" charset="0"/>
                         <a:cs typeface="맑은 고딕" charset="0"/>
@@ -20143,7 +20143,7 @@
                         <a:buNone/>
                       </a:pPr>
                       <a:r>
-                        <a:rPr lang="en-US" sz="2400" dirty="0">
+                        <a:rPr lang="en-US" sz="2600" dirty="0">
                           <a:solidFill>
                             <a:srgbClr val="1F2937"/>
                           </a:solidFill>
@@ -20153,7 +20153,7 @@
                         </a:rPr>
                         <a:t>1</a:t>
                       </a:r>
-                      <a:endParaRPr lang="en-US" sz="2400" dirty="0">
+                      <a:endParaRPr lang="en-US" sz="2600" dirty="0">
                         <a:latin typeface="맑은 고딕" charset="0"/>
                         <a:ea typeface="맑은 고딕" charset="0"/>
                         <a:cs typeface="맑은 고딕" charset="0"/>
@@ -20211,7 +20211,7 @@
                         <a:buNone/>
                       </a:pPr>
                       <a:r>
-                        <a:rPr lang="en-US" sz="2400" dirty="0">
+                        <a:rPr lang="en-US" sz="2600" dirty="0">
                           <a:solidFill>
                             <a:srgbClr val="1F2937"/>
                           </a:solidFill>
@@ -20221,7 +20221,7 @@
                         </a:rPr>
                         <a:t>2</a:t>
                       </a:r>
-                      <a:endParaRPr lang="en-US" sz="2400" dirty="0">
+                      <a:endParaRPr lang="en-US" sz="2600" dirty="0">
                         <a:latin typeface="맑은 고딕" charset="0"/>
                         <a:ea typeface="맑은 고딕" charset="0"/>
                         <a:cs typeface="맑은 고딕" charset="0"/>
@@ -20815,7 +20815,7 @@
           </p:nvPr>
         </p:nvGraphicFramePr>
         <p:xfrm>
-          <a:off x="7312914" y="2104644"/>
+          <a:off x="7312914" y="2044319"/>
           <a:ext cx="3291840" cy="914400"/>
         </p:xfrm>
         <a:graphic>
@@ -20828,7 +20828,7 @@
                 <a:gridCol w="822960"/>
                 <a:gridCol w="822960"/>
               </a:tblGrid>
-              <a:tr h="487680">
+              <a:tr h="511810">
                 <a:tc>
                   <a:txBody>
                     <a:bodyPr/>
@@ -20837,7 +20837,7 @@
                       <a:pPr eaLnBrk="0" algn="ctr" indent="0" marL="0">
                         <a:buNone/>
                       </a:pPr>
-                      <a:endParaRPr lang="en-US" sz="2400" dirty="0">
+                      <a:endParaRPr lang="en-US" sz="2600" dirty="0">
                         <a:latin typeface="맑은 고딕" charset="0"/>
                         <a:ea typeface="맑은 고딕" charset="0"/>
                         <a:cs typeface="맑은 고딕" charset="0"/>
@@ -20894,7 +20894,7 @@
                       <a:pPr eaLnBrk="0" algn="ctr" indent="0" marL="0">
                         <a:buNone/>
                       </a:pPr>
-                      <a:endParaRPr lang="en-US" sz="2400" dirty="0">
+                      <a:endParaRPr lang="en-US" sz="2600" dirty="0">
                         <a:latin typeface="맑은 고딕" charset="0"/>
                         <a:ea typeface="맑은 고딕" charset="0"/>
                         <a:cs typeface="맑은 고딕" charset="0"/>
@@ -20952,7 +20952,7 @@
                         <a:buNone/>
                       </a:pPr>
                       <a:r>
-                        <a:rPr lang="en-US" sz="2400" dirty="0">
+                        <a:rPr lang="en-US" sz="2600" dirty="0">
                           <a:solidFill>
                             <a:srgbClr val="1F2937"/>
                           </a:solidFill>
@@ -20962,7 +20962,7 @@
                         </a:rPr>
                         <a:t>2</a:t>
                       </a:r>
-                      <a:endParaRPr lang="en-US" sz="2400" dirty="0">
+                      <a:endParaRPr lang="en-US" sz="2600" dirty="0">
                         <a:latin typeface="맑은 고딕" charset="0"/>
                         <a:ea typeface="맑은 고딕" charset="0"/>
                         <a:cs typeface="맑은 고딕" charset="0"/>
@@ -21020,7 +21020,7 @@
                         <a:buNone/>
                       </a:pPr>
                       <a:r>
-                        <a:rPr lang="en-US" sz="2400" dirty="0">
+                        <a:rPr lang="en-US" sz="2600" dirty="0">
                           <a:solidFill>
                             <a:srgbClr val="1F2937"/>
                           </a:solidFill>
@@ -21030,7 +21030,7 @@
                         </a:rPr>
                         <a:t>1</a:t>
                       </a:r>
-                      <a:endParaRPr lang="en-US" sz="2400" dirty="0">
+                      <a:endParaRPr lang="en-US" sz="2600" dirty="0">
                         <a:latin typeface="맑은 고딕" charset="0"/>
                         <a:ea typeface="맑은 고딕" charset="0"/>
                         <a:cs typeface="맑은 고딕" charset="0"/>
@@ -21080,7 +21080,7 @@
                   </a:tcPr>
                 </a:tc>
               </a:tr>
-              <a:tr h="487680">
+              <a:tr h="511810">
                 <a:tc>
                   <a:txBody>
                     <a:bodyPr/>
@@ -21090,7 +21090,7 @@
                         <a:buNone/>
                       </a:pPr>
                       <a:r>
-                        <a:rPr lang="en-US" sz="2400" dirty="0">
+                        <a:rPr lang="en-US" sz="2600" dirty="0">
                           <a:solidFill>
                             <a:srgbClr val="1F2937"/>
                           </a:solidFill>
@@ -21100,7 +21100,7 @@
                         </a:rPr>
                         <a:t>×</a:t>
                       </a:r>
-                      <a:endParaRPr lang="en-US" sz="2400" dirty="0">
+                      <a:endParaRPr lang="en-US" sz="2600" dirty="0">
                         <a:latin typeface="맑은 고딕" charset="0"/>
                         <a:ea typeface="맑은 고딕" charset="0"/>
                         <a:cs typeface="맑은 고딕" charset="0"/>
@@ -21157,7 +21157,7 @@
                       <a:pPr eaLnBrk="0" algn="ctr" indent="0" marL="0">
                         <a:buNone/>
                       </a:pPr>
-                      <a:endParaRPr lang="en-US" sz="2400" dirty="0">
+                      <a:endParaRPr lang="en-US" sz="2600" dirty="0">
                         <a:latin typeface="맑은 고딕" charset="0"/>
                         <a:ea typeface="맑은 고딕" charset="0"/>
                         <a:cs typeface="맑은 고딕" charset="0"/>
@@ -21215,7 +21215,7 @@
                         <a:buNone/>
                       </a:pPr>
                       <a:r>
-                        <a:rPr lang="en-US" sz="2400" dirty="0">
+                        <a:rPr lang="en-US" sz="2600" dirty="0">
                           <a:solidFill>
                             <a:srgbClr val="1F2937"/>
                           </a:solidFill>
@@ -21225,7 +21225,7 @@
                         </a:rPr>
                         <a:t>3</a:t>
                       </a:r>
-                      <a:endParaRPr lang="en-US" sz="2400" dirty="0">
+                      <a:endParaRPr lang="en-US" sz="2600" dirty="0">
                         <a:latin typeface="맑은 고딕" charset="0"/>
                         <a:ea typeface="맑은 고딕" charset="0"/>
                         <a:cs typeface="맑은 고딕" charset="0"/>
@@ -21283,7 +21283,7 @@
                         <a:buNone/>
                       </a:pPr>
                       <a:r>
-                        <a:rPr lang="en-US" sz="2400" dirty="0">
+                        <a:rPr lang="en-US" sz="2600" dirty="0">
                           <a:solidFill>
                             <a:srgbClr val="1F2937"/>
                           </a:solidFill>
@@ -21293,7 +21293,7 @@
                         </a:rPr>
                         <a:t>4</a:t>
                       </a:r>
-                      <a:endParaRPr lang="en-US" sz="2400" dirty="0">
+                      <a:endParaRPr lang="en-US" sz="2600" dirty="0">
                         <a:latin typeface="맑은 고딕" charset="0"/>
                         <a:ea typeface="맑은 고딕" charset="0"/>
                         <a:cs typeface="맑은 고딕" charset="0"/>
@@ -21343,7 +21343,7 @@
                   </a:tcPr>
                 </a:tc>
               </a:tr>
-              <a:tr h="487680">
+              <a:tr h="511810">
                 <a:tc>
                   <a:txBody>
                     <a:bodyPr/>
@@ -21352,7 +21352,7 @@
                       <a:pPr eaLnBrk="0" algn="ctr" indent="0" marL="0">
                         <a:buNone/>
                       </a:pPr>
-                      <a:endParaRPr lang="en-US" sz="2400" dirty="0">
+                      <a:endParaRPr lang="en-US" sz="2600" dirty="0">
                         <a:latin typeface="맑은 고딕" charset="0"/>
                         <a:ea typeface="맑은 고딕" charset="0"/>
                         <a:cs typeface="맑은 고딕" charset="0"/>
@@ -21409,7 +21409,7 @@
                       <a:pPr eaLnBrk="0" algn="ctr" indent="0" marL="0">
                         <a:buNone/>
                       </a:pPr>
-                      <a:endParaRPr lang="en-US" sz="2400" dirty="0">
+                      <a:endParaRPr lang="en-US" sz="2600" dirty="0">
                         <a:latin typeface="맑은 고딕" charset="0"/>
                         <a:ea typeface="맑은 고딕" charset="0"/>
                         <a:cs typeface="맑은 고딕" charset="0"/>
@@ -21467,7 +21467,7 @@
                         <a:buNone/>
                       </a:pPr>
                       <a:r>
-                        <a:rPr lang="en-US" sz="2400" dirty="0">
+                        <a:rPr lang="en-US" sz="2600" dirty="0">
                           <a:solidFill>
                             <a:srgbClr val="1F2937"/>
                           </a:solidFill>
@@ -21477,7 +21477,7 @@
                         </a:rPr>
                         <a:t>□</a:t>
                       </a:r>
-                      <a:endParaRPr lang="en-US" sz="2400" dirty="0">
+                      <a:endParaRPr lang="en-US" sz="2600" dirty="0">
                         <a:latin typeface="맑은 고딕" charset="0"/>
                         <a:ea typeface="맑은 고딕" charset="0"/>
                         <a:cs typeface="맑은 고딕" charset="0"/>
@@ -21535,7 +21535,7 @@
                         <a:buNone/>
                       </a:pPr>
                       <a:r>
-                        <a:rPr lang="en-US" sz="2400" dirty="0">
+                        <a:rPr lang="en-US" sz="2600" dirty="0">
                           <a:solidFill>
                             <a:srgbClr val="1F2937"/>
                           </a:solidFill>
@@ -21545,7 +21545,7 @@
                         </a:rPr>
                         <a:t>□</a:t>
                       </a:r>
-                      <a:endParaRPr lang="en-US" sz="2400" dirty="0">
+                      <a:endParaRPr lang="en-US" sz="2600" dirty="0">
                         <a:latin typeface="맑은 고딕" charset="0"/>
                         <a:ea typeface="맑은 고딕" charset="0"/>
                         <a:cs typeface="맑은 고딕" charset="0"/>
@@ -21595,7 +21595,7 @@
                   </a:tcPr>
                 </a:tc>
               </a:tr>
-              <a:tr h="487680">
+              <a:tr h="511810">
                 <a:tc>
                   <a:txBody>
                     <a:bodyPr/>
@@ -21604,7 +21604,7 @@
                       <a:pPr eaLnBrk="0" algn="ctr" indent="0" marL="0">
                         <a:buNone/>
                       </a:pPr>
-                      <a:endParaRPr lang="en-US" sz="2400" dirty="0">
+                      <a:endParaRPr lang="en-US" sz="2600" dirty="0">
                         <a:latin typeface="맑은 고딕" charset="0"/>
                         <a:ea typeface="맑은 고딕" charset="0"/>
                         <a:cs typeface="맑은 고딕" charset="0"/>
@@ -21662,7 +21662,7 @@
                         <a:buNone/>
                       </a:pPr>
                       <a:r>
-                        <a:rPr lang="en-US" sz="2400" dirty="0">
+                        <a:rPr lang="en-US" sz="2600" dirty="0">
                           <a:solidFill>
                             <a:srgbClr val="1F2937"/>
                           </a:solidFill>
@@ -21672,7 +21672,7 @@
                         </a:rPr>
                         <a:t>□</a:t>
                       </a:r>
-                      <a:endParaRPr lang="en-US" sz="2400" dirty="0">
+                      <a:endParaRPr lang="en-US" sz="2600" dirty="0">
                         <a:latin typeface="맑은 고딕" charset="0"/>
                         <a:ea typeface="맑은 고딕" charset="0"/>
                         <a:cs typeface="맑은 고딕" charset="0"/>
@@ -21730,7 +21730,7 @@
                         <a:buNone/>
                       </a:pPr>
                       <a:r>
-                        <a:rPr lang="en-US" sz="2400" dirty="0">
+                        <a:rPr lang="en-US" sz="2600" dirty="0">
                           <a:solidFill>
                             <a:srgbClr val="1F2937"/>
                           </a:solidFill>
@@ -21740,7 +21740,7 @@
                         </a:rPr>
                         <a:t>□</a:t>
                       </a:r>
-                      <a:endParaRPr lang="en-US" sz="2400" dirty="0">
+                      <a:endParaRPr lang="en-US" sz="2600" dirty="0">
                         <a:latin typeface="맑은 고딕" charset="0"/>
                         <a:ea typeface="맑은 고딕" charset="0"/>
                         <a:cs typeface="맑은 고딕" charset="0"/>
@@ -21798,7 +21798,7 @@
                         <a:buNone/>
                       </a:pPr>
                       <a:r>
-                        <a:rPr lang="en-US" sz="2400" dirty="0">
+                        <a:rPr lang="en-US" sz="2600" dirty="0">
                           <a:solidFill>
                             <a:srgbClr val="1F2937"/>
                           </a:solidFill>
@@ -21808,7 +21808,7 @@
                         </a:rPr>
                         <a:t>□</a:t>
                       </a:r>
-                      <a:endParaRPr lang="en-US" sz="2400" dirty="0">
+                      <a:endParaRPr lang="en-US" sz="2600" dirty="0">
                         <a:latin typeface="맑은 고딕" charset="0"/>
                         <a:ea typeface="맑은 고딕" charset="0"/>
                         <a:cs typeface="맑은 고딕" charset="0"/>
@@ -21858,7 +21858,7 @@
                   </a:tcPr>
                 </a:tc>
               </a:tr>
-              <a:tr h="487680">
+              <a:tr h="511810">
                 <a:tc>
                   <a:txBody>
                     <a:bodyPr/>
@@ -21867,7 +21867,7 @@
                       <a:pPr eaLnBrk="0" algn="ctr" indent="0" marL="0">
                         <a:buNone/>
                       </a:pPr>
-                      <a:endParaRPr lang="en-US" sz="2400" dirty="0">
+                      <a:endParaRPr lang="en-US" sz="2600" dirty="0">
                         <a:latin typeface="맑은 고딕" charset="0"/>
                         <a:ea typeface="맑은 고딕" charset="0"/>
                         <a:cs typeface="맑은 고딕" charset="0"/>
@@ -21925,7 +21925,7 @@
                         <a:buNone/>
                       </a:pPr>
                       <a:r>
-                        <a:rPr lang="en-US" sz="2400" dirty="0">
+                        <a:rPr lang="en-US" sz="2600" dirty="0">
                           <a:solidFill>
                             <a:srgbClr val="1F2937"/>
                           </a:solidFill>
@@ -21935,7 +21935,7 @@
                         </a:rPr>
                         <a:t>□</a:t>
                       </a:r>
-                      <a:endParaRPr lang="en-US" sz="2400" dirty="0">
+                      <a:endParaRPr lang="en-US" sz="2600" dirty="0">
                         <a:latin typeface="맑은 고딕" charset="0"/>
                         <a:ea typeface="맑은 고딕" charset="0"/>
                         <a:cs typeface="맑은 고딕" charset="0"/>
@@ -21993,7 +21993,7 @@
                         <a:buNone/>
                       </a:pPr>
                       <a:r>
-                        <a:rPr lang="en-US" sz="2400" dirty="0">
+                        <a:rPr lang="en-US" sz="2600" dirty="0">
                           <a:solidFill>
                             <a:srgbClr val="1F2937"/>
                           </a:solidFill>
@@ -22003,7 +22003,7 @@
                         </a:rPr>
                         <a:t>□</a:t>
                       </a:r>
-                      <a:endParaRPr lang="en-US" sz="2400" dirty="0">
+                      <a:endParaRPr lang="en-US" sz="2600" dirty="0">
                         <a:latin typeface="맑은 고딕" charset="0"/>
                         <a:ea typeface="맑은 고딕" charset="0"/>
                         <a:cs typeface="맑은 고딕" charset="0"/>
@@ -22061,7 +22061,7 @@
                         <a:buNone/>
                       </a:pPr>
                       <a:r>
-                        <a:rPr lang="en-US" sz="2400" dirty="0">
+                        <a:rPr lang="en-US" sz="2600" dirty="0">
                           <a:solidFill>
                             <a:srgbClr val="1F2937"/>
                           </a:solidFill>
@@ -22071,7 +22071,7 @@
                         </a:rPr>
                         <a:t>□</a:t>
                       </a:r>
-                      <a:endParaRPr lang="en-US" sz="2400" dirty="0">
+                      <a:endParaRPr lang="en-US" sz="2600" dirty="0">
                         <a:latin typeface="맑은 고딕" charset="0"/>
                         <a:ea typeface="맑은 고딕" charset="0"/>
                         <a:cs typeface="맑은 고딕" charset="0"/>
